--- a/Slides/Semana 12/semana_12_slides.pptx
+++ b/Slides/Semana 12/semana_12_slides.pptx
@@ -956,7 +956,7 @@
           <a:p>
             <a:r>
               <a:rPr lang="en-US" dirty="0"/>
-              <a:t>Notas: Amarrar a mini aula antes da demonstração. Cada item retorna na demonstração ao vivo (bake de ID Map e Curvature no Blender + importação no 3D Coat) e no estúdio (pacote de quatro mapas de um asset do kit). Lembrar: crítica 🔵 informal nesta semana — o pacote de bakes gerado hoje será evidência de C6 (Bake) na CF5 da Semana 14 (Trim Sheets), quando o kit precisa estar tecnicamente coerente.</a:t>
+              <a:t>Notas: Amarrar a mini aula antes da demonstração. Cada item retorna na demonstração ao vivo (bake de ID Map e Curvature no Blender + importação no 3D Coat) e no estúdio (pacote de quatro mapas de um asset do kit). Lembrar: crítica 🔵 informal nesta semana — o pacote de bakes gerado hoje será evidência de C6 (Bake) na CF4 da Semana 14 (Trim Sheets), quando o kit precisa estar tecnicamente coerente.</a:t>
             </a:r>
             <a:endParaRPr lang="en-US" dirty="0"/>
           </a:p>

--- a/Slides/Semana 12/semana_12_slides.pptx
+++ b/Slides/Semana 12/semana_12_slides.pptx
@@ -516,7 +516,7 @@
           <a:p>
             <a:r>
               <a:rPr lang="en-US" dirty="0"/>
-              <a:t>Notas: Abertura da mini aula (20 min). Unidade III — Pintura Digital e Bake. Crítica 🔵 INFORMAL nesta semana (circulante, sem nota). Apostila: Parte V, Cap. 15 — Bake de Texturas (ID Map e Curvature Map); Parte V, Cap. 17 — Máscaras, Stencils e Decals. Mensagem central da capa: até a Semana 11 todo bake existia para SER VISTO (Normal engana a luz, AO dá sombra de contato). Hoje entram dois mapas que NÃO são feitos para o olho — são feitos para o software LER e gerar seleção/máscara automática no 3D Coat. O processo de bake em si (cage, ray distance, resolução) já foi dominado na S11; o que muda é o PROPÓSITO. Não antecipar Atlas/Trim Sheets (S13-14).</a:t>
+              <a:t>Notas: Abertura da mini aula (20 min). Unidade III — Pintura Digital e Bake. Crítica 🔵 INFORMAL nesta semana (circulante, sem nota). Apostila: Parte V, Cap. 15 — Bake de Texturas (ID Map e Curvature Map); Parte V, Cap. 17 — Máscaras, Stencils e Decals. Mensagem central da capa: até a Semana 11 todo bake existia para SER VISTO (Normal engana a luz, AO dá sombra de contato). Hoje entram dois mapas que NÃO são feitos para o olho — são feitos para o software LER e gerar seleção/máscara automática no 3DCoatTextura. O processo de bake em si (cage, ray distance, resolução) já foi dominado na S11; o que muda é o PROPÓSITO. Não antecipar Atlas/Trim Sheets (S13-14).</a:t>
             </a:r>
             <a:endParaRPr lang="en-US" dirty="0"/>
           </a:p>
@@ -692,7 +692,7 @@
           <a:p>
             <a:r>
               <a:rPr lang="en-US" dirty="0"/>
-              <a:t>Notas: O GitHub Action converte o mermaid em imagem — por isso o diagrama vai no markdown, não na nota. Fechar a ideia: os quatro mapas (Normal, AO, Curvature, ID Map) formam o pacote completo de bake da disciplina. A partir de agora qualquer asset novo pode passar pelo fluxo completo desde o início. O 3D Coat consome o pacote para gerar seleção e máscara; a pintura livre entra depois, só no refinamento.</a:t>
+              <a:t>Notas: O GitHub Action converte o mermaid em imagem — por isso o diagrama vai no markdown, não na nota. Fechar a ideia: os quatro mapas (Normal, AO, Curvature, ID Map) formam o pacote completo de bake da disciplina. A partir de agora qualquer asset novo pode passar pelo fluxo completo desde o início. O 3DCoatTextura consome o pacote para gerar seleção e máscara; a pintura livre entra depois, só no refinamento.</a:t>
             </a:r>
             <a:endParaRPr lang="en-US" dirty="0"/>
           </a:p>
@@ -868,7 +868,7 @@
           <a:p>
             <a:r>
               <a:rPr lang="en-US" dirty="0"/>
-              <a:t>Notas: Contextualizar o valor profissional (não decorativo). Em pipelines de produção (Substance Painter, 3D Coat), Curvature e ID alimentam "smart masks" e "smart materials" que se ajustam automaticamente à forma do objeto — o mesmo material aplicado a assets diferentes já respeita arestas e cavidades de cada um. É exatamente o princípio que volta nas Semanas 13-15 (Atlas, Trim Sheets, otimização): automação acelera, mas não substitui o julgamento artístico.</a:t>
+              <a:t>Notas: Contextualizar o valor profissional (não decorativo). Em pipelines de produção (Substance Painter, 3DCoatTextura), Curvature e ID alimentam "smart masks" e "smart materials" que se ajustam automaticamente à forma do objeto — o mesmo material aplicado a assets diferentes já respeita arestas e cavidades de cada um. É exatamente o princípio que volta nas Semanas 13-15 (Atlas, Trim Sheets, otimização): automação acelera, mas não substitui o julgamento artístico.</a:t>
             </a:r>
             <a:endParaRPr lang="en-US" dirty="0"/>
           </a:p>
@@ -956,7 +956,7 @@
           <a:p>
             <a:r>
               <a:rPr lang="en-US" dirty="0"/>
-              <a:t>Notas: Amarrar a mini aula antes da demonstração. Cada item retorna na demonstração ao vivo (bake de ID Map e Curvature no Blender + importação no 3D Coat) e no estúdio (pacote de quatro mapas de um asset do kit). Lembrar: crítica 🔵 informal nesta semana — o pacote de bakes gerado hoje será evidência de C6 (Bake) na CF4 da Semana 14 (Trim Sheets), quando o kit precisa estar tecnicamente coerente.</a:t>
+              <a:t>Notas: Amarrar a mini aula antes da demonstração. Cada item retorna na demonstração ao vivo (bake de ID Map e Curvature no Blender + importação no 3DCoatTextura) e no estúdio (pacote de quatro mapas de um asset do kit). Lembrar: crítica 🔵 informal nesta semana — o pacote de bakes gerado hoje será evidência de C6 (Bake) na CF4 da Semana 14 (Trim Sheets), quando o kit precisa estar tecnicamente coerente.</a:t>
             </a:r>
             <a:endParaRPr lang="en-US" dirty="0"/>
           </a:p>
@@ -1044,12 +1044,12 @@
           <a:p>
             <a:r>
               <a:rPr lang="en-US" dirty="0"/>
-              <a:t>Notas: Transição para a demonstração de 20 min. Sequência do plano de aula: asset com Mat_Madeira/Mat_Metal já preparado → bake de ID Map (Diffuse, só Color, sRGB, blocos sólidos sem gradiente) → bake de Curvature (Non-Color, direto no low-poly, Pointiness/método da versão) → importar no 3D Coat: Curvature alimenta Cavity Dirt, ID Map alimenta seleção por cor → antes/depois. No estúdio, cada estudante gera ID Map + Curvature de um asset do kit, fechando o pacote de quatro bakes.
+              <a:t>Notas: Transição para a demonstração de 20 min. Sequência do plano de aula: asset com Mat_Madeira/Mat_Metal já preparado → bake de ID Map (Diffuse, só Color, sRGB, blocos sólidos sem gradiente) → bake de Curvature (Non-Color, direto no low-poly, Pointiness/método da versão) → importar no 3DCoatTextura: Curvature alimenta Cavity Dirt, ID Map alimenta seleção por cor → antes/depois. No estúdio, cada estudante gera ID Map + Curvature de um asset do kit, fechando o pacote de quatro bakes.
 [!FIGURA]
 Objetivo didático: antecipar o alvo visual da demonstração para que a turma reconheça o resultado esperado antes de produzir no estúdio.
 Arquivo sugerido: assets/demo_idmap_curvature.webp
-Descrição: montagem de três painéis do asset de demonstração — (1) o ID Map com blocos de cor sólida saturada (uma cor por material, sem gradiente); (2) o Curvature Map com arestas claras e sulcos escuros; (3) o resultado no 3D Coat com Cavity Dirt automático nas cavidades e uma seleção de material isolada pela cor do ID Map.
-Como produzir: no Blender, bakear o ID Map (Diffuse/Color, sRGB) e o Curvature (Non-Color) do asset de demonstração; exportar ambos. No 3D Coat, importar os mapas, aplicar o Curvature como fonte de Cavity Dirt e usar o ID Map para uma seleção por cor. Capturar as três telas e compor lado a lado no Krita.</a:t>
+Descrição: montagem de três painéis do asset de demonstração — (1) o ID Map com blocos de cor sólida saturada (uma cor por material, sem gradiente); (2) o Curvature Map com arestas claras e sulcos escuros; (3) o resultado no 3DCoatTextura com Cavity Dirt automático nas cavidades e uma seleção de material isolada pela cor do ID Map.
+Como produzir: no Blender, bakear o ID Map (Diffuse/Color, sRGB) e o Curvature (Non-Color) do asset de demonstração; exportar ambos. No 3DCoatTextura, importar os mapas, aplicar o Curvature como fonte de Cavity Dirt e usar o ID Map para uma seleção por cor. Capturar as três telas e compor lado a lado no Krita.</a:t>
             </a:r>
             <a:endParaRPr lang="en-US" dirty="0"/>
           </a:p>
@@ -1225,7 +1225,7 @@
           <a:p>
             <a:r>
               <a:rPr lang="en-US" dirty="0"/>
-              <a:t>Notas: Pergunta de abertura (do plano de aula). Exibir no projetor um asset com dois materiais distintos (madeira + metal) já texturizado na S10, ao lado do MESMO asset como um ID Map colorido (uma cor sólida por material). Deixar 2-3 respostas. Direcionar para a ideia central: cada cor sólida no ID Map corresponde a um material — o 3D Coat lê essa imagem e gera uma máscara de seleção instantânea, sem seams nem cliques manuais.
+              <a:t>Notas: Pergunta de abertura (do plano de aula). Exibir no projetor um asset com dois materiais distintos (madeira + metal) já texturizado na S10, ao lado do MESMO asset como um ID Map colorido (uma cor sólida por material). Deixar 2-3 respostas. Direcionar para a ideia central: cada cor sólida no ID Map corresponde a um material — o 3DCoatTextura lê essa imagem e gera uma máscara de seleção instantânea, sem seams nem cliques manuais.
 [!FIGURA]
 Objetivo didático: materializar o salto conceitual da aula — a mesma peça vista como aparência (à esquerda) e como informação de seleção (à direita).
 Arquivo sugerido: assets/asset_vs_idmap.webp
@@ -1406,7 +1406,7 @@
           <a:p>
             <a:r>
               <a:rPr lang="en-US" dirty="0"/>
-              <a:t>Notas: Slide-chave da aula — o conceito que organiza tudo. Aparência: o bake é o produto final, vai ser visto. Máscara: o bake é meio, é lido por um gerador do 3D Coat para produzir automaticamente algo que antes era pintado à mão. Frase-âncora do plano de aula: "é a primeira vez em que o bake deixa de ser captura de aparência e passa a ser captura de informação para seleção." Se a turma sair só com esta distinção, a aula cumpriu o essencial.</a:t>
+              <a:t>Notas: Slide-chave da aula — o conceito que organiza tudo. Aparência: o bake é o produto final, vai ser visto. Máscara: o bake é meio, é lido por um gerador do 3DCoatTextura para produzir automaticamente algo que antes era pintado à mão. Frase-âncora do plano de aula: "é a primeira vez em que o bake deixa de ser captura de aparência e passa a ser captura de informação para seleção." Se a turma sair só com esta distinção, a aula cumpriu o essencial.</a:t>
             </a:r>
             <a:endParaRPr lang="en-US" dirty="0"/>
           </a:p>
